--- a/docs/deck/dokett-deck.pptx
+++ b/docs/deck/dokett-deck.pptx
@@ -2911,7 +2911,7 @@
                 <a:ea typeface="Courier New" pitchFamily="34" charset="-122"/>
                 <a:cs typeface="Courier New" pitchFamily="34" charset="-120"/>
               </a:rPr>
-              <a:t>covenant-console.vercel.app</a:t>
+              <a:t>dokett-console.vercel.app</a:t>
             </a:r>
             <a:endParaRPr lang="en-US" sz="1300" dirty="0"/>
           </a:p>
@@ -2950,7 +2950,7 @@
                 <a:ea typeface="Courier New" pitchFamily="34" charset="-122"/>
                 <a:cs typeface="Courier New" pitchFamily="34" charset="-120"/>
               </a:rPr>
-              <a:t>covenant-lens.fly.dev</a:t>
+              <a:t>dokett-lens.fly.dev</a:t>
             </a:r>
             <a:endParaRPr lang="en-US" sz="1300" dirty="0"/>
           </a:p>
@@ -2989,7 +2989,7 @@
                 <a:ea typeface="Courier New" pitchFamily="34" charset="-122"/>
                 <a:cs typeface="Courier New" pitchFamily="34" charset="-120"/>
               </a:rPr>
-              <a:t>github.com/successaje/covenant</a:t>
+              <a:t>github.com/successaje/Dokett</a:t>
             </a:r>
             <a:endParaRPr lang="en-US" sz="1300" dirty="0"/>
           </a:p>

--- a/docs/deck/dokett-deck.pptx
+++ b/docs/deck/dokett-deck.pptx
@@ -8950,7 +8950,7 @@
                 <a:ea typeface="Calibri" pitchFamily="34" charset="-122"/>
                 <a:cs typeface="Calibri" pitchFamily="34" charset="-120"/>
               </a:rPr>
-              <a:t>TECHNICAL DEPTH</a:t>
+              <a:t>CONTRIBUTED BACK</a:t>
             </a:r>
             <a:endParaRPr lang="en-US" sz="1100" dirty="0"/>
           </a:p>
@@ -8981,7 +8981,7 @@
               <a:buNone/>
             </a:pPr>
             <a:r>
-              <a:rPr lang="en-US" sz="3000" b="1" dirty="0">
+              <a:rPr lang="en-US" sz="2800" b="1" dirty="0">
                 <a:solidFill>
                   <a:srgbClr val="16181C"/>
                 </a:solidFill>
@@ -8989,9 +8989,9 @@
                 <a:ea typeface="Cambria" pitchFamily="34" charset="-122"/>
                 <a:cs typeface="Cambria" pitchFamily="34" charset="-120"/>
               </a:rPr>
-              <a:t>The guarded path around a raw precompile</a:t>
-            </a:r>
-            <a:endParaRPr lang="en-US" sz="3000" dirty="0"/>
+              <a:t>We found a footgun in Attestcoin — and published the fix</a:t>
+            </a:r>
+            <a:endParaRPr lang="en-US" sz="2800" dirty="0"/>
           </a:p>
         </p:txBody>
       </p:sp>
@@ -9048,7 +9048,7 @@
                 <a:ea typeface="Calibri" pitchFamily="34" charset="-122"/>
                 <a:cs typeface="Calibri" pitchFamily="34" charset="-120"/>
               </a:rPr>
-              <a:t>Real mainnet evidence, from testnet</a:t>
+              <a:t>BlockProver proves inclusion. Not success.</a:t>
             </a:r>
             <a:endParaRPr lang="en-US" sz="1450" dirty="0"/>
           </a:p>
@@ -9090,7 +9090,7 @@
                 <a:ea typeface="Calibri" pitchFamily="34" charset="-122"/>
                 <a:cs typeface="Calibri" pitchFamily="34" charset="-120"/>
               </a:rPr>
-              <a:t>CC3 testnet attests Ethereum mainnet at chainkey 3. Every proof in this build is against a real mainnet transaction.</a:t>
+              <a:t>A reverted ERC-20 transfer is still validly included, carrying real-looking Transfer logs. Prove inclusion, read the logs, and you accept a payment that never moved a cent — while the proof verifies correctly.</a:t>
             </a:r>
             <a:endParaRPr lang="en-US" sz="1200" dirty="0"/>
           </a:p>
@@ -9149,7 +9149,7 @@
                 <a:ea typeface="Calibri" pitchFamily="34" charset="-122"/>
                 <a:cs typeface="Calibri" pitchFamily="34" charset="-120"/>
               </a:rPr>
-              <a:t>BlockProver does not validate success</a:t>
+              <a:t>AscVerify.sol is the guard layer — MIT, standalone</a:t>
             </a:r>
             <a:endParaRPr lang="en-US" sz="1450" dirty="0"/>
           </a:p>
@@ -9191,7 +9191,7 @@
                 <a:ea typeface="Calibri" pitchFamily="34" charset="-122"/>
                 <a:cs typeface="Calibri" pitchFamily="34" charset="-120"/>
               </a:rPr>
-              <a:t>A reverted ERC-20 transfer is still a validly-included transaction. AscVerify.sol asserts receipt status == 0x1 before any log is touched — published standalone, MIT.</a:t>
+              <a:t>Asserts receipt status == 0x1 before any log is touched. Replay-guards every proof on (chainKey, height, txIndex, logIndex). Enforces confirmation depth against the attested head. Resolves chainkeys at runtime.</a:t>
             </a:r>
             <a:endParaRPr lang="en-US" sz="1200" dirty="0"/>
           </a:p>
@@ -9250,7 +9250,7 @@
                 <a:ea typeface="Calibri" pitchFamily="34" charset="-122"/>
                 <a:cs typeface="Calibri" pitchFamily="34" charset="-120"/>
               </a:rPr>
-              <a:t>Replay-guarded, confirmation-gated</a:t>
+              <a:t>None of it is credit-specific</a:t>
             </a:r>
             <a:endParaRPr lang="en-US" sz="1450" dirty="0"/>
           </a:p>
@@ -9292,7 +9292,7 @@
                 <a:ea typeface="Calibri" pitchFamily="34" charset="-122"/>
                 <a:cs typeface="Calibri" pitchFamily="34" charset="-120"/>
               </a:rPr>
-              <a:t>Every proof keys on (chainKey, height, txIndex, logIndex). Confirmation depth is enforced against the attested head, not assumed.</a:t>
+              <a:t>These are what anyone reading another chain’s events has to get right, and getting them wrong fails quietly. Published for every integrator, not kept in our repo.</a:t>
             </a:r>
             <a:endParaRPr lang="en-US" sz="1200" dirty="0"/>
           </a:p>
@@ -9351,7 +9351,7 @@
                 <a:ea typeface="Calibri" pitchFamily="34" charset="-122"/>
                 <a:cs typeface="Calibri" pitchFamily="34" charset="-120"/>
               </a:rPr>
-              <a:t>Liveness circuit breaker</a:t>
+              <a:t>Real mainnet evidence, and a liveness circuit breaker</a:t>
             </a:r>
             <a:endParaRPr lang="en-US" sz="1450" dirty="0"/>
           </a:p>
@@ -9393,7 +9393,7 @@
                 <a:ea typeface="Calibri" pitchFamily="34" charset="-122"/>
                 <a:cs typeface="Calibri" pitchFamily="34" charset="-120"/>
               </a:rPr>
-              <a:t>penaltiesEnabled() requires an unbroken observation record. A stalled oracle must never manufacture defaults across every obligation at once.</a:t>
+              <a:t>CC3 attests Ethereum mainnet at chainkey 3 — every proof here is a real mainnet transaction. penaltiesEnabled() requires unbroken observation, so a stalled oracle can never manufacture defaults.</a:t>
             </a:r>
             <a:endParaRPr lang="en-US" sz="1200" dirty="0"/>
           </a:p>

--- a/docs/deck/dokett-deck.pptx
+++ b/docs/deck/dokett-deck.pptx
@@ -2845,7 +2845,7 @@
                 <a:ea typeface="Calibri" pitchFamily="34" charset="-122"/>
                 <a:cs typeface="Calibri" pitchFamily="34" charset="-120"/>
               </a:rPr>
-              <a:t>66 contract tests + 7 Lens projection tests, passing</a:t>
+              <a:t>67 contract + 7 Lens projection + 16 relay tests, all passing</a:t>
             </a:r>
             <a:endParaRPr lang="en-US" sz="1300" dirty="0"/>
           </a:p>
